--- a/구현 현황/프로그래밍 브리핑/2026.08.10 대장장이 프로그래밍 브리핑.pptx
+++ b/구현 현황/프로그래밍 브리핑/2026.08.10 대장장이 프로그래밍 브리핑.pptx
@@ -1,21 +1,21 @@
 
 <file path=ppt/presentation.xml><?xml version="1.0" encoding="utf-8"?>
-<p:presentation xmlns:a="http://schemas.openxmlformats.org/drawingml/2006/main" xmlns:r="http://schemas.openxmlformats.org/officeDocument/2006/relationships" xmlns:mc="http://schemas.openxmlformats.org/markup-compatibility/2006" xmlns:mv="urn:schemas-microsoft-com:mac:vml" xmlns:p="http://schemas.openxmlformats.org/presentationml/2006/main" xmlns:c="http://schemas.openxmlformats.org/drawingml/2006/chart" xmlns:dgm="http://schemas.openxmlformats.org/drawingml/2006/diagram" xmlns:o="urn:schemas-microsoft-com:office:office" xmlns:v="urn:schemas-microsoft-com:vml" xmlns:pvml="urn:schemas-microsoft-com:office:powerpoint" xmlns:com="http://schemas.openxmlformats.org/drawingml/2006/compatibility" xmlns:p14="http://schemas.microsoft.com/office/powerpoint/2010/main" xmlns:p15="http://schemas.microsoft.com/office/powerpoint/2012/main" xmlns:ahyp="http://schemas.microsoft.com/office/drawing/2018/hyperlinkcolor" autoCompressPictures="0" strictFirstAndLastChars="0" saveSubsetFonts="1">
+<p:presentation xmlns:r="http://schemas.openxmlformats.org/officeDocument/2006/relationships" xmlns:c="http://schemas.openxmlformats.org/drawingml/2006/chart" xmlns:a="http://schemas.openxmlformats.org/drawingml/2006/main" xmlns:dgm="http://schemas.openxmlformats.org/drawingml/2006/diagram" xmlns:dsp="http://schemas.microsoft.com/office/drawing/2008/diagram" xmlns:p="http://schemas.openxmlformats.org/presentationml/2006/main" strictFirstAndLastChars="0" autoCompressPictures="0">
   <p:sldMasterIdLst>
-    <p:sldMasterId id="2147483648" r:id="rId3"/>
+    <p:sldMasterId id="2147483661" r:id="rId1"/>
   </p:sldMasterIdLst>
   <p:notesMasterIdLst>
-    <p:notesMasterId r:id="rId4"/>
+    <p:notesMasterId r:id="rId2"/>
   </p:notesMasterIdLst>
   <p:sldIdLst>
-    <p:sldId id="256" r:id="rId5"/>
-    <p:sldId id="257" r:id="rId6"/>
-    <p:sldId id="258" r:id="rId7"/>
+    <p:sldId id="256" r:id="rId3"/>
+    <p:sldId id="257" r:id="rId4"/>
+    <p:sldId id="258" r:id="rId5"/>
   </p:sldIdLst>
-  <p:sldSz cy="6858000" cx="12192000"/>
+  <p:sldSz cx="12192000" cy="6858000"/>
   <p:notesSz cx="6858000" cy="9144000"/>
   <p:defaultTextStyle>
-    <a:defPPr lvl="0" marR="0" rtl="0" algn="l">
+    <a:defPPr marR="0" lvl="0" algn="l" rtl="0">
       <a:lnSpc>
         <a:spcPct val="100000"/>
       </a:lnSpc>
@@ -26,7 +26,7 @@
         <a:spcPts val="0"/>
       </a:spcAft>
     </a:defPPr>
-    <a:lvl1pPr lvl="0" marR="0" rtl="0" algn="l">
+    <a:lvl1pPr marR="0" lvl="0" algn="l" rtl="0">
       <a:lnSpc>
         <a:spcPct val="100000"/>
       </a:lnSpc>
@@ -40,7 +40,7 @@
         <a:srgbClr val="000000"/>
       </a:buClr>
       <a:buFont typeface="Arial"/>
-      <a:defRPr b="0" i="0" spc="0" sz="1400" u="none" cap="none" strike="noStrike">
+      <a:defRPr sz="1400" b="0" i="0" u="none" strike="noStrike" cap="none" spc="0">
         <a:solidFill>
           <a:srgbClr val="000000"/>
         </a:solidFill>
@@ -50,7 +50,7 @@
         <a:sym typeface="Arial"/>
       </a:defRPr>
     </a:lvl1pPr>
-    <a:lvl2pPr lvl="1" marR="0" rtl="0" algn="l">
+    <a:lvl2pPr marR="0" lvl="1" algn="l" rtl="0">
       <a:lnSpc>
         <a:spcPct val="100000"/>
       </a:lnSpc>
@@ -64,7 +64,7 @@
         <a:srgbClr val="000000"/>
       </a:buClr>
       <a:buFont typeface="Arial"/>
-      <a:defRPr b="0" i="0" spc="0" sz="1400" u="none" cap="none" strike="noStrike">
+      <a:defRPr sz="1400" b="0" i="0" u="none" strike="noStrike" cap="none" spc="0">
         <a:solidFill>
           <a:srgbClr val="000000"/>
         </a:solidFill>
@@ -74,7 +74,7 @@
         <a:sym typeface="Arial"/>
       </a:defRPr>
     </a:lvl2pPr>
-    <a:lvl3pPr lvl="2" marR="0" rtl="0" algn="l">
+    <a:lvl3pPr marR="0" lvl="2" algn="l" rtl="0">
       <a:lnSpc>
         <a:spcPct val="100000"/>
       </a:lnSpc>
@@ -88,7 +88,7 @@
         <a:srgbClr val="000000"/>
       </a:buClr>
       <a:buFont typeface="Arial"/>
-      <a:defRPr b="0" i="0" spc="0" sz="1400" u="none" cap="none" strike="noStrike">
+      <a:defRPr sz="1400" b="0" i="0" u="none" strike="noStrike" cap="none" spc="0">
         <a:solidFill>
           <a:srgbClr val="000000"/>
         </a:solidFill>
@@ -98,7 +98,7 @@
         <a:sym typeface="Arial"/>
       </a:defRPr>
     </a:lvl3pPr>
-    <a:lvl4pPr lvl="3" marR="0" rtl="0" algn="l">
+    <a:lvl4pPr marR="0" lvl="3" algn="l" rtl="0">
       <a:lnSpc>
         <a:spcPct val="100000"/>
       </a:lnSpc>
@@ -112,7 +112,7 @@
         <a:srgbClr val="000000"/>
       </a:buClr>
       <a:buFont typeface="Arial"/>
-      <a:defRPr b="0" i="0" spc="0" sz="1400" u="none" cap="none" strike="noStrike">
+      <a:defRPr sz="1400" b="0" i="0" u="none" strike="noStrike" cap="none" spc="0">
         <a:solidFill>
           <a:srgbClr val="000000"/>
         </a:solidFill>
@@ -122,7 +122,7 @@
         <a:sym typeface="Arial"/>
       </a:defRPr>
     </a:lvl4pPr>
-    <a:lvl5pPr lvl="4" marR="0" rtl="0" algn="l">
+    <a:lvl5pPr marR="0" lvl="4" algn="l" rtl="0">
       <a:lnSpc>
         <a:spcPct val="100000"/>
       </a:lnSpc>
@@ -136,7 +136,7 @@
         <a:srgbClr val="000000"/>
       </a:buClr>
       <a:buFont typeface="Arial"/>
-      <a:defRPr b="0" i="0" spc="0" sz="1400" u="none" cap="none" strike="noStrike">
+      <a:defRPr sz="1400" b="0" i="0" u="none" strike="noStrike" cap="none" spc="0">
         <a:solidFill>
           <a:srgbClr val="000000"/>
         </a:solidFill>
@@ -146,7 +146,7 @@
         <a:sym typeface="Arial"/>
       </a:defRPr>
     </a:lvl5pPr>
-    <a:lvl6pPr lvl="5" marR="0" rtl="0" algn="l">
+    <a:lvl6pPr marR="0" lvl="5" algn="l" rtl="0">
       <a:lnSpc>
         <a:spcPct val="100000"/>
       </a:lnSpc>
@@ -160,7 +160,7 @@
         <a:srgbClr val="000000"/>
       </a:buClr>
       <a:buFont typeface="Arial"/>
-      <a:defRPr b="0" i="0" spc="0" sz="1400" u="none" cap="none" strike="noStrike">
+      <a:defRPr sz="1400" b="0" i="0" u="none" strike="noStrike" cap="none" spc="0">
         <a:solidFill>
           <a:srgbClr val="000000"/>
         </a:solidFill>
@@ -170,7 +170,7 @@
         <a:sym typeface="Arial"/>
       </a:defRPr>
     </a:lvl6pPr>
-    <a:lvl7pPr lvl="6" marR="0" rtl="0" algn="l">
+    <a:lvl7pPr marR="0" lvl="6" algn="l" rtl="0">
       <a:lnSpc>
         <a:spcPct val="100000"/>
       </a:lnSpc>
@@ -184,7 +184,7 @@
         <a:srgbClr val="000000"/>
       </a:buClr>
       <a:buFont typeface="Arial"/>
-      <a:defRPr b="0" i="0" spc="0" sz="1400" u="none" cap="none" strike="noStrike">
+      <a:defRPr sz="1400" b="0" i="0" u="none" strike="noStrike" cap="none" spc="0">
         <a:solidFill>
           <a:srgbClr val="000000"/>
         </a:solidFill>
@@ -194,7 +194,7 @@
         <a:sym typeface="Arial"/>
       </a:defRPr>
     </a:lvl7pPr>
-    <a:lvl8pPr lvl="7" marR="0" rtl="0" algn="l">
+    <a:lvl8pPr marR="0" lvl="7" algn="l" rtl="0">
       <a:lnSpc>
         <a:spcPct val="100000"/>
       </a:lnSpc>
@@ -208,7 +208,7 @@
         <a:srgbClr val="000000"/>
       </a:buClr>
       <a:buFont typeface="Arial"/>
-      <a:defRPr b="0" i="0" spc="0" sz="1400" u="none" cap="none" strike="noStrike">
+      <a:defRPr sz="1400" b="0" i="0" u="none" strike="noStrike" cap="none" spc="0">
         <a:solidFill>
           <a:srgbClr val="000000"/>
         </a:solidFill>
@@ -218,7 +218,7 @@
         <a:sym typeface="Arial"/>
       </a:defRPr>
     </a:lvl8pPr>
-    <a:lvl9pPr lvl="8" marR="0" rtl="0" algn="l">
+    <a:lvl9pPr marR="0" lvl="8" algn="l" rtl="0">
       <a:lnSpc>
         <a:spcPct val="100000"/>
       </a:lnSpc>
@@ -232,7 +232,7 @@
         <a:srgbClr val="000000"/>
       </a:buClr>
       <a:buFont typeface="Arial"/>
-      <a:defRPr b="0" i="0" spc="0" sz="1400" u="none" cap="none" strike="noStrike">
+      <a:defRPr sz="1400" b="0" i="0" u="none" strike="noStrike" cap="none" spc="0">
         <a:solidFill>
           <a:srgbClr val="000000"/>
         </a:solidFill>
@@ -243,19 +243,14 @@
       </a:defRPr>
     </a:lvl9pPr>
   </p:defaultTextStyle>
-  <p:extLst>
-    <p:ext uri="GoogleSlidesCustomDataVersion2">
-      <go:slidesCustomData xmlns:go="http://customooxmlschemas.google.com/" r:id="rId8" roundtripDataSignature="AMtx7mg+D2JNiK9DXZucyTWtMt3hLvRCJg=="/>
-    </p:ext>
-  </p:extLst>
 </p:presentation>
 </file>
 
 <file path=ppt/notesMasters/notesMaster1.xml><?xml version="1.0" encoding="utf-8"?>
-<p:notesMaster xmlns:a="http://schemas.openxmlformats.org/drawingml/2006/main" xmlns:r="http://schemas.openxmlformats.org/officeDocument/2006/relationships" xmlns:mc="http://schemas.openxmlformats.org/markup-compatibility/2006" xmlns:mv="urn:schemas-microsoft-com:mac:vml" xmlns:p="http://schemas.openxmlformats.org/presentationml/2006/main" xmlns:c="http://schemas.openxmlformats.org/drawingml/2006/chart" xmlns:dgm="http://schemas.openxmlformats.org/drawingml/2006/diagram" xmlns:o="urn:schemas-microsoft-com:office:office" xmlns:v="urn:schemas-microsoft-com:vml" xmlns:pvml="urn:schemas-microsoft-com:office:powerpoint" xmlns:com="http://schemas.openxmlformats.org/drawingml/2006/compatibility" xmlns:p14="http://schemas.microsoft.com/office/powerpoint/2010/main" xmlns:p15="http://schemas.microsoft.com/office/powerpoint/2012/main" xmlns:ahyp="http://schemas.microsoft.com/office/drawing/2018/hyperlinkcolor">
+<p:notesMaster xmlns:r="http://schemas.openxmlformats.org/officeDocument/2006/relationships" xmlns:c="http://schemas.openxmlformats.org/drawingml/2006/chart" xmlns:a="http://schemas.openxmlformats.org/drawingml/2006/main" xmlns:dgm="http://schemas.openxmlformats.org/drawingml/2006/diagram" xmlns:dsp="http://schemas.microsoft.com/office/drawing/2008/diagram" xmlns:p="http://schemas.openxmlformats.org/presentationml/2006/main">
   <p:cSld>
     <p:bg>
-      <p:bgPr>
+      <p:bgPr shadeToTitle="0">
         <a:solidFill>
           <a:schemeClr val="lt1"/>
         </a:solidFill>
@@ -263,7 +258,7 @@
     </p:bg>
     <p:spTree>
       <p:nvGrpSpPr>
-        <p:cNvPr id="2" name="Shape 2"/>
+        <p:cNvPr id="1" name=""/>
         <p:cNvGrpSpPr/>
         <p:nvPr/>
       </p:nvGrpSpPr>
@@ -278,9 +273,11 @@
       <p:sp>
         <p:nvSpPr>
           <p:cNvPr id="3" name="Google Shape;3;n"/>
-          <p:cNvSpPr/>
+          <p:cNvSpPr>
+            <a:spLocks noGrp="1" noRot="1" noChangeAspect="1" noTextEdit="1"/>
+          </p:cNvSpPr>
           <p:nvPr>
-            <p:ph idx="2" type="sldImg"/>
+            <p:ph type="sldImg" idx="2"/>
           </p:nvPr>
         </p:nvSpPr>
         <p:spPr>
@@ -289,9 +286,11 @@
             <a:ext cx="4572225" cy="3429000"/>
           </a:xfrm>
           <a:custGeom>
-            <a:rect b="b" l="l" r="r" t="t"/>
+            <a:avLst/>
+            <a:gdLst/>
+            <a:rect l="l" t="t" r="r" b="b"/>
             <a:pathLst>
-              <a:path extrusionOk="0" h="120000" w="120000">
+              <a:path w="120000" h="120000" extrusionOk="0">
                 <a:moveTo>
                   <a:pt x="0" y="0"/>
                 </a:moveTo>
@@ -309,23 +308,25 @@
             </a:pathLst>
           </a:custGeom>
           <a:noFill/>
-          <a:ln cap="flat" cmpd="sng" w="9525">
+          <a:ln w="9525" cap="flat" cmpd="sng">
             <a:solidFill>
               <a:srgbClr val="000000"/>
             </a:solidFill>
             <a:prstDash val="solid"/>
             <a:round/>
-            <a:headEnd len="sm" w="sm" type="none"/>
-            <a:tailEnd len="sm" w="sm" type="none"/>
+            <a:headEnd w="sm" len="sm"/>
+            <a:tailEnd w="sm" len="sm"/>
           </a:ln>
         </p:spPr>
       </p:sp>
       <p:sp>
         <p:nvSpPr>
           <p:cNvPr id="4" name="Google Shape;4;n"/>
-          <p:cNvSpPr txBox="1"/>
+          <p:cNvSpPr txBox="1">
+            <a:spLocks noGrp="1"/>
+          </p:cNvSpPr>
           <p:nvPr>
-            <p:ph idx="1" type="body"/>
+            <p:ph type="body" idx="1"/>
           </p:nvPr>
         </p:nvSpPr>
         <p:spPr>
@@ -342,11 +343,11 @@
           </a:ln>
         </p:spPr>
         <p:txBody>
-          <a:bodyPr anchorCtr="0" anchor="t" bIns="91425" lIns="91425" spcFirstLastPara="1" rIns="91425" wrap="square" tIns="91425">
+          <a:bodyPr wrap="square" lIns="91424" tIns="91424" rIns="91424" bIns="91424" anchor="t" anchorCtr="0">
             <a:noAutofit/>
           </a:bodyPr>
           <a:lstStyle>
-            <a:lvl1pPr indent="-298450" lvl="0" marL="457200" marR="0" rtl="0" algn="l">
+            <a:lvl1pPr marL="457200" marR="0" lvl="0" indent="-298450" algn="l" rtl="0">
               <a:lnSpc>
                 <a:spcPct val="100000"/>
               </a:lnSpc>
@@ -362,7 +363,7 @@
               <a:buSzPts val="1100"/>
               <a:buFont typeface="Arial"/>
               <a:buChar char="●"/>
-              <a:defRPr b="0" i="0" sz="1100" u="none" cap="none" strike="noStrike">
+              <a:defRPr sz="1100" b="0" i="0" u="none" strike="noStrike" cap="none">
                 <a:solidFill>
                   <a:srgbClr val="000000"/>
                 </a:solidFill>
@@ -372,7 +373,7 @@
                 <a:sym typeface="Arial"/>
               </a:defRPr>
             </a:lvl1pPr>
-            <a:lvl2pPr indent="-298450" lvl="1" marL="914400" marR="0" rtl="0" algn="l">
+            <a:lvl2pPr marL="914400" marR="0" lvl="1" indent="-298450" algn="l" rtl="0">
               <a:lnSpc>
                 <a:spcPct val="100000"/>
               </a:lnSpc>
@@ -388,7 +389,7 @@
               <a:buSzPts val="1100"/>
               <a:buFont typeface="Arial"/>
               <a:buChar char="○"/>
-              <a:defRPr b="0" i="0" sz="1100" u="none" cap="none" strike="noStrike">
+              <a:defRPr sz="1100" b="0" i="0" u="none" strike="noStrike" cap="none">
                 <a:solidFill>
                   <a:srgbClr val="000000"/>
                 </a:solidFill>
@@ -398,7 +399,7 @@
                 <a:sym typeface="Arial"/>
               </a:defRPr>
             </a:lvl2pPr>
-            <a:lvl3pPr indent="-298450" lvl="2" marL="1371600" marR="0" rtl="0" algn="l">
+            <a:lvl3pPr marL="1371600" marR="0" lvl="2" indent="-298450" algn="l" rtl="0">
               <a:lnSpc>
                 <a:spcPct val="100000"/>
               </a:lnSpc>
@@ -414,7 +415,7 @@
               <a:buSzPts val="1100"/>
               <a:buFont typeface="Arial"/>
               <a:buChar char="■"/>
-              <a:defRPr b="0" i="0" sz="1100" u="none" cap="none" strike="noStrike">
+              <a:defRPr sz="1100" b="0" i="0" u="none" strike="noStrike" cap="none">
                 <a:solidFill>
                   <a:srgbClr val="000000"/>
                 </a:solidFill>
@@ -424,7 +425,7 @@
                 <a:sym typeface="Arial"/>
               </a:defRPr>
             </a:lvl3pPr>
-            <a:lvl4pPr indent="-298450" lvl="3" marL="1828800" marR="0" rtl="0" algn="l">
+            <a:lvl4pPr marL="1828800" marR="0" lvl="3" indent="-298450" algn="l" rtl="0">
               <a:lnSpc>
                 <a:spcPct val="100000"/>
               </a:lnSpc>
@@ -440,7 +441,7 @@
               <a:buSzPts val="1100"/>
               <a:buFont typeface="Arial"/>
               <a:buChar char="●"/>
-              <a:defRPr b="0" i="0" sz="1100" u="none" cap="none" strike="noStrike">
+              <a:defRPr sz="1100" b="0" i="0" u="none" strike="noStrike" cap="none">
                 <a:solidFill>
                   <a:srgbClr val="000000"/>
                 </a:solidFill>
@@ -450,7 +451,7 @@
                 <a:sym typeface="Arial"/>
               </a:defRPr>
             </a:lvl4pPr>
-            <a:lvl5pPr indent="-298450" lvl="4" marL="2286000" marR="0" rtl="0" algn="l">
+            <a:lvl5pPr marL="2286000" marR="0" lvl="4" indent="-298450" algn="l" rtl="0">
               <a:lnSpc>
                 <a:spcPct val="100000"/>
               </a:lnSpc>
@@ -466,7 +467,7 @@
               <a:buSzPts val="1100"/>
               <a:buFont typeface="Arial"/>
               <a:buChar char="○"/>
-              <a:defRPr b="0" i="0" sz="1100" u="none" cap="none" strike="noStrike">
+              <a:defRPr sz="1100" b="0" i="0" u="none" strike="noStrike" cap="none">
                 <a:solidFill>
                   <a:srgbClr val="000000"/>
                 </a:solidFill>
@@ -476,7 +477,7 @@
                 <a:sym typeface="Arial"/>
               </a:defRPr>
             </a:lvl5pPr>
-            <a:lvl6pPr indent="-298450" lvl="5" marL="2743200" marR="0" rtl="0" algn="l">
+            <a:lvl6pPr marL="2743200" marR="0" lvl="5" indent="-298450" algn="l" rtl="0">
               <a:lnSpc>
                 <a:spcPct val="100000"/>
               </a:lnSpc>
@@ -492,7 +493,7 @@
               <a:buSzPts val="1100"/>
               <a:buFont typeface="Arial"/>
               <a:buChar char="■"/>
-              <a:defRPr b="0" i="0" sz="1100" u="none" cap="none" strike="noStrike">
+              <a:defRPr sz="1100" b="0" i="0" u="none" strike="noStrike" cap="none">
                 <a:solidFill>
                   <a:srgbClr val="000000"/>
                 </a:solidFill>
@@ -502,7 +503,7 @@
                 <a:sym typeface="Arial"/>
               </a:defRPr>
             </a:lvl6pPr>
-            <a:lvl7pPr indent="-298450" lvl="6" marL="3200400" marR="0" rtl="0" algn="l">
+            <a:lvl7pPr marL="3200400" marR="0" lvl="6" indent="-298450" algn="l" rtl="0">
               <a:lnSpc>
                 <a:spcPct val="100000"/>
               </a:lnSpc>
@@ -518,7 +519,7 @@
               <a:buSzPts val="1100"/>
               <a:buFont typeface="Arial"/>
               <a:buChar char="●"/>
-              <a:defRPr b="0" i="0" sz="1100" u="none" cap="none" strike="noStrike">
+              <a:defRPr sz="1100" b="0" i="0" u="none" strike="noStrike" cap="none">
                 <a:solidFill>
                   <a:srgbClr val="000000"/>
                 </a:solidFill>
@@ -528,7 +529,7 @@
                 <a:sym typeface="Arial"/>
               </a:defRPr>
             </a:lvl7pPr>
-            <a:lvl8pPr indent="-298450" lvl="7" marL="3657600" marR="0" rtl="0" algn="l">
+            <a:lvl8pPr marL="3657600" marR="0" lvl="7" indent="-298450" algn="l" rtl="0">
               <a:lnSpc>
                 <a:spcPct val="100000"/>
               </a:lnSpc>
@@ -544,7 +545,7 @@
               <a:buSzPts val="1100"/>
               <a:buFont typeface="Arial"/>
               <a:buChar char="○"/>
-              <a:defRPr b="0" i="0" sz="1100" u="none" cap="none" strike="noStrike">
+              <a:defRPr sz="1100" b="0" i="0" u="none" strike="noStrike" cap="none">
                 <a:solidFill>
                   <a:srgbClr val="000000"/>
                 </a:solidFill>
@@ -554,7 +555,7 @@
                 <a:sym typeface="Arial"/>
               </a:defRPr>
             </a:lvl8pPr>
-            <a:lvl9pPr indent="-298450" lvl="8" marL="4114800" marR="0" rtl="0" algn="l">
+            <a:lvl9pPr marL="4114800" marR="0" lvl="8" indent="-298450" algn="l" rtl="0">
               <a:lnSpc>
                 <a:spcPct val="100000"/>
               </a:lnSpc>
@@ -570,7 +571,7 @@
               <a:buSzPts val="1100"/>
               <a:buFont typeface="Arial"/>
               <a:buChar char="■"/>
-              <a:defRPr b="0" i="0" sz="1100" u="none" cap="none" strike="noStrike">
+              <a:defRPr sz="1100" b="0" i="0" u="none" strike="noStrike" cap="none">
                 <a:solidFill>
                   <a:srgbClr val="000000"/>
                 </a:solidFill>
@@ -581,14 +582,24 @@
               </a:defRPr>
             </a:lvl9pPr>
           </a:lstStyle>
-          <a:p/>
+          <a:p>
+            <a:pPr>
+              <a:defRPr/>
+            </a:pPr>
+            <a:r>
+              <a:rPr lang="ko-KR" altLang="en-US"/>
+              <a:t/>
+            </a:r>
+            <a:endParaRPr lang="ko-KR" altLang="en-US"/>
+          </a:p>
         </p:txBody>
       </p:sp>
     </p:spTree>
   </p:cSld>
-  <p:clrMap accent1="accent1" accent2="accent2" accent3="accent3" accent4="accent4" accent5="accent5" accent6="accent6" bg1="lt1" bg2="dk2" tx1="dk1" tx2="lt2" folHlink="folHlink" hlink="hlink"/>
+  <p:clrMap bg1="lt1" tx1="dk1" bg2="dk2" tx2="lt2" accent1="accent1" accent2="accent2" accent3="accent3" accent4="accent4" accent5="accent5" accent6="accent6" hlink="hlink" folHlink="folHlink"/>
+  <p:hf hdr="0" ftr="0" dt="0"/>
   <p:notesStyle>
-    <a:defPPr lvl="0" marR="0" rtl="0" algn="l">
+    <a:defPPr marR="0" lvl="0" algn="l" rtl="0">
       <a:lnSpc>
         <a:spcPct val="100000"/>
       </a:lnSpc>
@@ -599,7 +610,7 @@
         <a:spcPts val="0"/>
       </a:spcAft>
     </a:defPPr>
-    <a:lvl1pPr lvl="0" marR="0" rtl="0" algn="l">
+    <a:lvl1pPr marR="0" lvl="0" algn="l" rtl="0">
       <a:lnSpc>
         <a:spcPct val="100000"/>
       </a:lnSpc>
@@ -613,7 +624,7 @@
         <a:srgbClr val="000000"/>
       </a:buClr>
       <a:buFont typeface="Arial"/>
-      <a:defRPr b="0" i="0" spc="0" sz="1400" u="none" cap="none" strike="noStrike">
+      <a:defRPr sz="1400" b="0" i="0" u="none" strike="noStrike" cap="none" spc="0">
         <a:solidFill>
           <a:srgbClr val="000000"/>
         </a:solidFill>
@@ -623,7 +634,7 @@
         <a:sym typeface="Arial"/>
       </a:defRPr>
     </a:lvl1pPr>
-    <a:lvl2pPr lvl="1" marR="0" rtl="0" algn="l">
+    <a:lvl2pPr marR="0" lvl="1" algn="l" rtl="0">
       <a:lnSpc>
         <a:spcPct val="100000"/>
       </a:lnSpc>
@@ -637,7 +648,7 @@
         <a:srgbClr val="000000"/>
       </a:buClr>
       <a:buFont typeface="Arial"/>
-      <a:defRPr b="0" i="0" spc="0" sz="1400" u="none" cap="none" strike="noStrike">
+      <a:defRPr sz="1400" b="0" i="0" u="none" strike="noStrike" cap="none" spc="0">
         <a:solidFill>
           <a:srgbClr val="000000"/>
         </a:solidFill>
@@ -647,7 +658,7 @@
         <a:sym typeface="Arial"/>
       </a:defRPr>
     </a:lvl2pPr>
-    <a:lvl3pPr lvl="2" marR="0" rtl="0" algn="l">
+    <a:lvl3pPr marR="0" lvl="2" algn="l" rtl="0">
       <a:lnSpc>
         <a:spcPct val="100000"/>
       </a:lnSpc>
@@ -661,7 +672,7 @@
         <a:srgbClr val="000000"/>
       </a:buClr>
       <a:buFont typeface="Arial"/>
-      <a:defRPr b="0" i="0" spc="0" sz="1400" u="none" cap="none" strike="noStrike">
+      <a:defRPr sz="1400" b="0" i="0" u="none" strike="noStrike" cap="none" spc="0">
         <a:solidFill>
           <a:srgbClr val="000000"/>
         </a:solidFill>
@@ -671,7 +682,7 @@
         <a:sym typeface="Arial"/>
       </a:defRPr>
     </a:lvl3pPr>
-    <a:lvl4pPr lvl="3" marR="0" rtl="0" algn="l">
+    <a:lvl4pPr marR="0" lvl="3" algn="l" rtl="0">
       <a:lnSpc>
         <a:spcPct val="100000"/>
       </a:lnSpc>
@@ -685,7 +696,7 @@
         <a:srgbClr val="000000"/>
       </a:buClr>
       <a:buFont typeface="Arial"/>
-      <a:defRPr b="0" i="0" spc="0" sz="1400" u="none" cap="none" strike="noStrike">
+      <a:defRPr sz="1400" b="0" i="0" u="none" strike="noStrike" cap="none" spc="0">
         <a:solidFill>
           <a:srgbClr val="000000"/>
         </a:solidFill>
@@ -695,7 +706,7 @@
         <a:sym typeface="Arial"/>
       </a:defRPr>
     </a:lvl4pPr>
-    <a:lvl5pPr lvl="4" marR="0" rtl="0" algn="l">
+    <a:lvl5pPr marR="0" lvl="4" algn="l" rtl="0">
       <a:lnSpc>
         <a:spcPct val="100000"/>
       </a:lnSpc>
@@ -709,7 +720,7 @@
         <a:srgbClr val="000000"/>
       </a:buClr>
       <a:buFont typeface="Arial"/>
-      <a:defRPr b="0" i="0" spc="0" sz="1400" u="none" cap="none" strike="noStrike">
+      <a:defRPr sz="1400" b="0" i="0" u="none" strike="noStrike" cap="none" spc="0">
         <a:solidFill>
           <a:srgbClr val="000000"/>
         </a:solidFill>
@@ -719,7 +730,7 @@
         <a:sym typeface="Arial"/>
       </a:defRPr>
     </a:lvl5pPr>
-    <a:lvl6pPr lvl="5" marR="0" rtl="0" algn="l">
+    <a:lvl6pPr marR="0" lvl="5" algn="l" rtl="0">
       <a:lnSpc>
         <a:spcPct val="100000"/>
       </a:lnSpc>
@@ -733,7 +744,7 @@
         <a:srgbClr val="000000"/>
       </a:buClr>
       <a:buFont typeface="Arial"/>
-      <a:defRPr b="0" i="0" spc="0" sz="1400" u="none" cap="none" strike="noStrike">
+      <a:defRPr sz="1400" b="0" i="0" u="none" strike="noStrike" cap="none" spc="0">
         <a:solidFill>
           <a:srgbClr val="000000"/>
         </a:solidFill>
@@ -743,7 +754,7 @@
         <a:sym typeface="Arial"/>
       </a:defRPr>
     </a:lvl6pPr>
-    <a:lvl7pPr lvl="6" marR="0" rtl="0" algn="l">
+    <a:lvl7pPr marR="0" lvl="6" algn="l" rtl="0">
       <a:lnSpc>
         <a:spcPct val="100000"/>
       </a:lnSpc>
@@ -757,7 +768,7 @@
         <a:srgbClr val="000000"/>
       </a:buClr>
       <a:buFont typeface="Arial"/>
-      <a:defRPr b="0" i="0" spc="0" sz="1400" u="none" cap="none" strike="noStrike">
+      <a:defRPr sz="1400" b="0" i="0" u="none" strike="noStrike" cap="none" spc="0">
         <a:solidFill>
           <a:srgbClr val="000000"/>
         </a:solidFill>
@@ -767,7 +778,7 @@
         <a:sym typeface="Arial"/>
       </a:defRPr>
     </a:lvl7pPr>
-    <a:lvl8pPr lvl="7" marR="0" rtl="0" algn="l">
+    <a:lvl8pPr marR="0" lvl="7" algn="l" rtl="0">
       <a:lnSpc>
         <a:spcPct val="100000"/>
       </a:lnSpc>
@@ -781,7 +792,7 @@
         <a:srgbClr val="000000"/>
       </a:buClr>
       <a:buFont typeface="Arial"/>
-      <a:defRPr b="0" i="0" spc="0" sz="1400" u="none" cap="none" strike="noStrike">
+      <a:defRPr sz="1400" b="0" i="0" u="none" strike="noStrike" cap="none" spc="0">
         <a:solidFill>
           <a:srgbClr val="000000"/>
         </a:solidFill>
@@ -791,7 +802,7 @@
         <a:sym typeface="Arial"/>
       </a:defRPr>
     </a:lvl8pPr>
-    <a:lvl9pPr lvl="8" marR="0" rtl="0" algn="l">
+    <a:lvl9pPr marR="0" lvl="8" algn="l" rtl="0">
       <a:lnSpc>
         <a:spcPct val="100000"/>
       </a:lnSpc>
@@ -805,7 +816,7 @@
         <a:srgbClr val="000000"/>
       </a:buClr>
       <a:buFont typeface="Arial"/>
-      <a:defRPr b="0" i="0" spc="0" sz="1400" u="none" cap="none" strike="noStrike">
+      <a:defRPr sz="1400" b="0" i="0" u="none" strike="noStrike" cap="none" spc="0">
         <a:solidFill>
           <a:srgbClr val="000000"/>
         </a:solidFill>
@@ -820,11 +831,11 @@
 </file>
 
 <file path=ppt/notesSlides/notesSlide1.xml><?xml version="1.0" encoding="utf-8"?>
-<p:notes xmlns:a="http://schemas.openxmlformats.org/drawingml/2006/main" xmlns:r="http://schemas.openxmlformats.org/officeDocument/2006/relationships" xmlns:mc="http://schemas.openxmlformats.org/markup-compatibility/2006" xmlns:mv="urn:schemas-microsoft-com:mac:vml" xmlns:p="http://schemas.openxmlformats.org/presentationml/2006/main" xmlns:c="http://schemas.openxmlformats.org/drawingml/2006/chart" xmlns:dgm="http://schemas.openxmlformats.org/drawingml/2006/diagram" xmlns:o="urn:schemas-microsoft-com:office:office" xmlns:v="urn:schemas-microsoft-com:vml" xmlns:pvml="urn:schemas-microsoft-com:office:powerpoint" xmlns:com="http://schemas.openxmlformats.org/drawingml/2006/compatibility" xmlns:p14="http://schemas.microsoft.com/office/powerpoint/2010/main" xmlns:p15="http://schemas.microsoft.com/office/powerpoint/2012/main" xmlns:ahyp="http://schemas.microsoft.com/office/drawing/2018/hyperlinkcolor" showMasterPhAnim="0" showMasterSp="0">
+<p:notes xmlns:r="http://schemas.openxmlformats.org/officeDocument/2006/relationships" xmlns:c="http://schemas.openxmlformats.org/drawingml/2006/chart" xmlns:a="http://schemas.openxmlformats.org/drawingml/2006/main" xmlns:dgm="http://schemas.openxmlformats.org/drawingml/2006/diagram" xmlns:dsp="http://schemas.microsoft.com/office/drawing/2008/diagram" xmlns:p="http://schemas.openxmlformats.org/presentationml/2006/main" showMasterSp="0" showMasterPhAnim="0">
   <p:cSld>
     <p:spTree>
       <p:nvGrpSpPr>
-        <p:cNvPr id="80" name="Shape 80"/>
+        <p:cNvPr id="1" name=""/>
         <p:cNvGrpSpPr/>
         <p:nvPr/>
       </p:nvGrpSpPr>
@@ -839,9 +850,11 @@
       <p:sp>
         <p:nvSpPr>
           <p:cNvPr id="81" name="Google Shape;81;p1:notes"/>
-          <p:cNvSpPr txBox="1"/>
+          <p:cNvSpPr txBox="1">
+            <a:spLocks noGrp="1"/>
+          </p:cNvSpPr>
           <p:nvPr>
-            <p:ph idx="1" type="body"/>
+            <p:ph type="body" idx="1"/>
           </p:nvPr>
         </p:nvSpPr>
         <p:spPr>
@@ -858,37 +871,41 @@
           </a:ln>
         </p:spPr>
         <p:txBody>
-          <a:bodyPr anchorCtr="0" anchor="t" bIns="91425" lIns="91425" spcFirstLastPara="1" rIns="91425" wrap="square" tIns="91425">
+          <a:bodyPr wrap="square" lIns="91424" tIns="91424" rIns="91424" bIns="91424" anchor="t" anchorCtr="0">
             <a:noAutofit/>
           </a:bodyPr>
           <a:lstStyle/>
           <a:p>
-            <a:pPr indent="0" lvl="0" marL="0" rtl="0" algn="l">
-              <a:lnSpc>
-                <a:spcPct val="100000"/>
-              </a:lnSpc>
-              <a:spcBef>
-                <a:spcPts val="0"/>
-              </a:spcBef>
-              <a:spcAft>
-                <a:spcPts val="0"/>
-              </a:spcAft>
-              <a:buSzPts val="1100"/>
-              <a:buNone/>
+            <a:pPr marL="0" lvl="0" indent="0" algn="l" rtl="0">
+              <a:lnSpc>
+                <a:spcPct val="100000"/>
+              </a:lnSpc>
+              <a:spcBef>
+                <a:spcPts val="0"/>
+              </a:spcBef>
+              <a:spcAft>
+                <a:spcPts val="0"/>
+              </a:spcAft>
+              <a:buSzPct val="25000"/>
+              <a:buNone/>
+              <a:defRPr/>
             </a:pPr>
             <a:r>
+              <a:rPr lang="ko-KR" altLang="en-US"/>
               <a:t/>
             </a:r>
-            <a:endParaRPr/>
+            <a:endParaRPr lang="ko-KR" altLang="en-US"/>
           </a:p>
         </p:txBody>
       </p:sp>
       <p:sp>
         <p:nvSpPr>
           <p:cNvPr id="82" name="Google Shape;82;p1:notes"/>
-          <p:cNvSpPr/>
+          <p:cNvSpPr>
+            <a:spLocks noGrp="1" noRot="1" noChangeAspect="1" noTextEdit="1"/>
+          </p:cNvSpPr>
           <p:nvPr>
-            <p:ph idx="2" type="sldImg"/>
+            <p:ph type="sldImg" idx="2"/>
           </p:nvPr>
         </p:nvSpPr>
         <p:spPr>
@@ -897,9 +914,11 @@
             <a:ext cx="6096000" cy="3429000"/>
           </a:xfrm>
           <a:custGeom>
-            <a:rect b="b" l="l" r="r" t="t"/>
+            <a:avLst/>
+            <a:gdLst/>
+            <a:rect l="l" t="t" r="r" b="b"/>
             <a:pathLst>
-              <a:path extrusionOk="0" h="120000" w="120000">
+              <a:path w="120000" h="120000" extrusionOk="0">
                 <a:moveTo>
                   <a:pt x="0" y="0"/>
                 </a:moveTo>
@@ -917,14 +936,14 @@
             </a:pathLst>
           </a:custGeom>
           <a:noFill/>
-          <a:ln cap="flat" cmpd="sng" w="9525">
+          <a:ln w="9525" cap="flat" cmpd="sng">
             <a:solidFill>
               <a:srgbClr val="000000"/>
             </a:solidFill>
             <a:prstDash val="solid"/>
             <a:round/>
-            <a:headEnd len="sm" w="sm" type="none"/>
-            <a:tailEnd len="sm" w="sm" type="none"/>
+            <a:headEnd w="sm" len="sm"/>
+            <a:tailEnd w="sm" len="sm"/>
           </a:ln>
         </p:spPr>
       </p:sp>
@@ -937,11 +956,11 @@
 </file>
 
 <file path=ppt/notesSlides/notesSlide2.xml><?xml version="1.0" encoding="utf-8"?>
-<p:notes xmlns:a="http://schemas.openxmlformats.org/drawingml/2006/main" xmlns:r="http://schemas.openxmlformats.org/officeDocument/2006/relationships" xmlns:mc="http://schemas.openxmlformats.org/markup-compatibility/2006" xmlns:mv="urn:schemas-microsoft-com:mac:vml" xmlns:p="http://schemas.openxmlformats.org/presentationml/2006/main" xmlns:c="http://schemas.openxmlformats.org/drawingml/2006/chart" xmlns:dgm="http://schemas.openxmlformats.org/drawingml/2006/diagram" xmlns:o="urn:schemas-microsoft-com:office:office" xmlns:v="urn:schemas-microsoft-com:vml" xmlns:pvml="urn:schemas-microsoft-com:office:powerpoint" xmlns:com="http://schemas.openxmlformats.org/drawingml/2006/compatibility" xmlns:p14="http://schemas.microsoft.com/office/powerpoint/2010/main" xmlns:p15="http://schemas.microsoft.com/office/powerpoint/2012/main" xmlns:ahyp="http://schemas.microsoft.com/office/drawing/2018/hyperlinkcolor" showMasterPhAnim="0" showMasterSp="0">
+<p:notes xmlns:r="http://schemas.openxmlformats.org/officeDocument/2006/relationships" xmlns:c="http://schemas.openxmlformats.org/drawingml/2006/chart" xmlns:a="http://schemas.openxmlformats.org/drawingml/2006/main" xmlns:dgm="http://schemas.openxmlformats.org/drawingml/2006/diagram" xmlns:dsp="http://schemas.microsoft.com/office/drawing/2008/diagram" xmlns:p="http://schemas.openxmlformats.org/presentationml/2006/main" showMasterSp="0" showMasterPhAnim="0">
   <p:cSld>
     <p:spTree>
       <p:nvGrpSpPr>
-        <p:cNvPr id="86" name="Shape 86"/>
+        <p:cNvPr id="1" name=""/>
         <p:cNvGrpSpPr/>
         <p:nvPr/>
       </p:nvGrpSpPr>
@@ -956,9 +975,11 @@
       <p:sp>
         <p:nvSpPr>
           <p:cNvPr id="87" name="Google Shape;87;g3f3111f0559_0_6:notes"/>
-          <p:cNvSpPr txBox="1"/>
+          <p:cNvSpPr txBox="1">
+            <a:spLocks noGrp="1"/>
+          </p:cNvSpPr>
           <p:nvPr>
-            <p:ph idx="1" type="body"/>
+            <p:ph type="body" idx="1"/>
           </p:nvPr>
         </p:nvSpPr>
         <p:spPr>
@@ -975,12 +996,12 @@
           </a:ln>
         </p:spPr>
         <p:txBody>
-          <a:bodyPr anchorCtr="0" anchor="t" bIns="91400" lIns="91400" spcFirstLastPara="1" rIns="91400" wrap="square" tIns="91400">
+          <a:bodyPr wrap="square" lIns="91400" tIns="91400" rIns="91400" bIns="91400" anchor="t" anchorCtr="0">
             <a:noAutofit/>
           </a:bodyPr>
           <a:lstStyle/>
           <a:p>
-            <a:pPr indent="0" lvl="0" marL="0" rtl="0" algn="l">
+            <a:pPr marL="0" lvl="0" indent="0" algn="l" rtl="0">
               <a:lnSpc>
                 <a:spcPct val="100000"/>
               </a:lnSpc>
@@ -993,23 +1014,27 @@
               <a:buClr>
                 <a:schemeClr val="dk1"/>
               </a:buClr>
-              <a:buSzPts val="1200"/>
-              <a:buFont typeface="Malgun Gothic"/>
-              <a:buNone/>
+              <a:buSzPct val="25000"/>
+              <a:buFont typeface="맑은 고딕"/>
+              <a:buNone/>
+              <a:defRPr/>
             </a:pPr>
             <a:r>
+              <a:rPr lang="ko-KR" altLang="en-US"/>
               <a:t/>
             </a:r>
-            <a:endParaRPr/>
+            <a:endParaRPr lang="ko-KR" altLang="en-US"/>
           </a:p>
         </p:txBody>
       </p:sp>
       <p:sp>
         <p:nvSpPr>
           <p:cNvPr id="88" name="Google Shape;88;g3f3111f0559_0_6:notes"/>
-          <p:cNvSpPr/>
+          <p:cNvSpPr>
+            <a:spLocks noGrp="1" noRot="1" noChangeAspect="1" noTextEdit="1"/>
+          </p:cNvSpPr>
           <p:nvPr>
-            <p:ph idx="2" type="sldImg"/>
+            <p:ph type="sldImg" idx="2"/>
           </p:nvPr>
         </p:nvSpPr>
         <p:spPr>
@@ -1018,9 +1043,11 @@
             <a:ext cx="6096000" cy="3429000"/>
           </a:xfrm>
           <a:custGeom>
-            <a:rect b="b" l="l" r="r" t="t"/>
+            <a:avLst/>
+            <a:gdLst/>
+            <a:rect l="l" t="t" r="r" b="b"/>
             <a:pathLst>
-              <a:path extrusionOk="0" h="120000" w="120000">
+              <a:path w="120000" h="120000" extrusionOk="0">
                 <a:moveTo>
                   <a:pt x="0" y="0"/>
                 </a:moveTo>
@@ -1038,14 +1065,14 @@
             </a:pathLst>
           </a:custGeom>
           <a:noFill/>
-          <a:ln cap="flat" cmpd="sng" w="12700">
+          <a:ln w="12700" cap="flat" cmpd="sng">
             <a:solidFill>
               <a:srgbClr val="000000"/>
             </a:solidFill>
             <a:prstDash val="solid"/>
             <a:round/>
-            <a:headEnd len="sm" w="sm" type="none"/>
-            <a:tailEnd len="sm" w="sm" type="none"/>
+            <a:headEnd w="sm" len="sm"/>
+            <a:tailEnd w="sm" len="sm"/>
           </a:ln>
         </p:spPr>
       </p:sp>
@@ -1058,11 +1085,11 @@
 </file>
 
 <file path=ppt/notesSlides/notesSlide3.xml><?xml version="1.0" encoding="utf-8"?>
-<p:notes xmlns:a="http://schemas.openxmlformats.org/drawingml/2006/main" xmlns:r="http://schemas.openxmlformats.org/officeDocument/2006/relationships" xmlns:mc="http://schemas.openxmlformats.org/markup-compatibility/2006" xmlns:mv="urn:schemas-microsoft-com:mac:vml" xmlns:p="http://schemas.openxmlformats.org/presentationml/2006/main" xmlns:c="http://schemas.openxmlformats.org/drawingml/2006/chart" xmlns:dgm="http://schemas.openxmlformats.org/drawingml/2006/diagram" xmlns:o="urn:schemas-microsoft-com:office:office" xmlns:v="urn:schemas-microsoft-com:vml" xmlns:pvml="urn:schemas-microsoft-com:office:powerpoint" xmlns:com="http://schemas.openxmlformats.org/drawingml/2006/compatibility" xmlns:p14="http://schemas.microsoft.com/office/powerpoint/2010/main" xmlns:p15="http://schemas.microsoft.com/office/powerpoint/2012/main" xmlns:ahyp="http://schemas.microsoft.com/office/drawing/2018/hyperlinkcolor" showMasterPhAnim="0" showMasterSp="0">
+<p:notes xmlns:r="http://schemas.openxmlformats.org/officeDocument/2006/relationships" xmlns:c="http://schemas.openxmlformats.org/drawingml/2006/chart" xmlns:a="http://schemas.openxmlformats.org/drawingml/2006/main" xmlns:dgm="http://schemas.openxmlformats.org/drawingml/2006/diagram" xmlns:dsp="http://schemas.microsoft.com/office/drawing/2008/diagram" xmlns:p="http://schemas.openxmlformats.org/presentationml/2006/main" showMasterSp="0" showMasterPhAnim="0">
   <p:cSld>
     <p:spTree>
       <p:nvGrpSpPr>
-        <p:cNvPr id="92" name="Shape 92"/>
+        <p:cNvPr id="1" name=""/>
         <p:cNvGrpSpPr/>
         <p:nvPr/>
       </p:nvGrpSpPr>
@@ -1077,9 +1104,11 @@
       <p:sp>
         <p:nvSpPr>
           <p:cNvPr id="93" name="Google Shape;93;g3f6ab65b82c_1_2:notes"/>
-          <p:cNvSpPr txBox="1"/>
+          <p:cNvSpPr txBox="1">
+            <a:spLocks noGrp="1"/>
+          </p:cNvSpPr>
           <p:nvPr>
-            <p:ph idx="1" type="body"/>
+            <p:ph type="body" idx="1"/>
           </p:nvPr>
         </p:nvSpPr>
         <p:spPr>
@@ -1096,12 +1125,12 @@
           </a:ln>
         </p:spPr>
         <p:txBody>
-          <a:bodyPr anchorCtr="0" anchor="t" bIns="91400" lIns="91400" spcFirstLastPara="1" rIns="91400" wrap="square" tIns="91400">
+          <a:bodyPr wrap="square" lIns="91400" tIns="91400" rIns="91400" bIns="91400" anchor="t" anchorCtr="0">
             <a:noAutofit/>
           </a:bodyPr>
           <a:lstStyle/>
           <a:p>
-            <a:pPr indent="0" lvl="0" marL="0" rtl="0" algn="l">
+            <a:pPr marL="0" lvl="0" indent="0" algn="l" rtl="0">
               <a:lnSpc>
                 <a:spcPct val="100000"/>
               </a:lnSpc>
@@ -1114,23 +1143,27 @@
               <a:buClr>
                 <a:schemeClr val="dk1"/>
               </a:buClr>
-              <a:buSzPts val="1200"/>
-              <a:buFont typeface="Malgun Gothic"/>
-              <a:buNone/>
+              <a:buSzPct val="25000"/>
+              <a:buFont typeface="맑은 고딕"/>
+              <a:buNone/>
+              <a:defRPr/>
             </a:pPr>
             <a:r>
+              <a:rPr lang="ko-KR" altLang="en-US"/>
               <a:t/>
             </a:r>
-            <a:endParaRPr/>
+            <a:endParaRPr lang="ko-KR" altLang="en-US"/>
           </a:p>
         </p:txBody>
       </p:sp>
       <p:sp>
         <p:nvSpPr>
           <p:cNvPr id="94" name="Google Shape;94;g3f6ab65b82c_1_2:notes"/>
-          <p:cNvSpPr/>
+          <p:cNvSpPr>
+            <a:spLocks noGrp="1" noRot="1" noChangeAspect="1" noTextEdit="1"/>
+          </p:cNvSpPr>
           <p:nvPr>
-            <p:ph idx="2" type="sldImg"/>
+            <p:ph type="sldImg" idx="2"/>
           </p:nvPr>
         </p:nvSpPr>
         <p:spPr>
@@ -1139,9 +1172,11 @@
             <a:ext cx="6096000" cy="3429000"/>
           </a:xfrm>
           <a:custGeom>
-            <a:rect b="b" l="l" r="r" t="t"/>
+            <a:avLst/>
+            <a:gdLst/>
+            <a:rect l="l" t="t" r="r" b="b"/>
             <a:pathLst>
-              <a:path extrusionOk="0" h="120000" w="120000">
+              <a:path w="120000" h="120000" extrusionOk="0">
                 <a:moveTo>
                   <a:pt x="0" y="0"/>
                 </a:moveTo>
@@ -1159,14 +1194,14 @@
             </a:pathLst>
           </a:custGeom>
           <a:noFill/>
-          <a:ln cap="flat" cmpd="sng" w="12700">
+          <a:ln w="12700" cap="flat" cmpd="sng">
             <a:solidFill>
               <a:srgbClr val="000000"/>
             </a:solidFill>
             <a:prstDash val="solid"/>
             <a:round/>
-            <a:headEnd len="sm" w="sm" type="none"/>
-            <a:tailEnd len="sm" w="sm" type="none"/>
+            <a:headEnd w="sm" len="sm"/>
+            <a:tailEnd w="sm" len="sm"/>
           </a:ln>
         </p:spPr>
       </p:sp>
@@ -14237,11 +14272,11 @@
 </file>
 
 <file path=ppt/slides/slide1.xml><?xml version="1.0" encoding="utf-8"?>
-<p:sld xmlns:a="http://schemas.openxmlformats.org/drawingml/2006/main" xmlns:r="http://schemas.openxmlformats.org/officeDocument/2006/relationships" xmlns:mc="http://schemas.openxmlformats.org/markup-compatibility/2006" xmlns:mv="urn:schemas-microsoft-com:mac:vml" xmlns:p="http://schemas.openxmlformats.org/presentationml/2006/main" xmlns:c="http://schemas.openxmlformats.org/drawingml/2006/chart" xmlns:dgm="http://schemas.openxmlformats.org/drawingml/2006/diagram" xmlns:o="urn:schemas-microsoft-com:office:office" xmlns:v="urn:schemas-microsoft-com:vml" xmlns:pvml="urn:schemas-microsoft-com:office:powerpoint" xmlns:com="http://schemas.openxmlformats.org/drawingml/2006/compatibility" xmlns:p14="http://schemas.microsoft.com/office/powerpoint/2010/main" xmlns:p15="http://schemas.microsoft.com/office/powerpoint/2012/main" xmlns:ahyp="http://schemas.microsoft.com/office/drawing/2018/hyperlinkcolor">
+<p:sld xmlns:r="http://schemas.openxmlformats.org/officeDocument/2006/relationships" xmlns:c="http://schemas.openxmlformats.org/drawingml/2006/chart" xmlns:a="http://schemas.openxmlformats.org/drawingml/2006/main" xmlns:dgm="http://schemas.openxmlformats.org/drawingml/2006/diagram" xmlns:dsp="http://schemas.microsoft.com/office/drawing/2008/diagram" xmlns:p="http://schemas.openxmlformats.org/presentationml/2006/main">
   <p:cSld>
     <p:spTree>
       <p:nvGrpSpPr>
-        <p:cNvPr id="83" name="Shape 83"/>
+        <p:cNvPr id="1" name=""/>
         <p:cNvGrpSpPr/>
         <p:nvPr/>
       </p:nvGrpSpPr>
@@ -14256,9 +14291,11 @@
       <p:sp>
         <p:nvSpPr>
           <p:cNvPr id="84" name="Google Shape;84;p1"/>
-          <p:cNvSpPr txBox="1"/>
+          <p:cNvSpPr txBox="1">
+            <a:spLocks noGrp="1"/>
+          </p:cNvSpPr>
           <p:nvPr>
-            <p:ph type="ctrTitle"/>
+            <p:ph type="ctrTitle" idx="0"/>
           </p:nvPr>
         </p:nvSpPr>
         <p:spPr>
@@ -14275,12 +14312,12 @@
           </a:ln>
         </p:spPr>
         <p:txBody>
-          <a:bodyPr anchorCtr="0" anchor="b" bIns="45700" lIns="91425" spcFirstLastPara="1" rIns="91425" wrap="square" tIns="45700">
+          <a:bodyPr wrap="square" lIns="91424" tIns="45700" rIns="91424" bIns="45700" anchor="b" anchorCtr="0">
             <a:normAutofit/>
           </a:bodyPr>
           <a:lstStyle/>
           <a:p>
-            <a:pPr indent="0" lvl="0" marL="0" rtl="0" algn="ctr">
+            <a:pPr marL="0" lvl="0" indent="0" algn="ctr" rtl="0">
               <a:lnSpc>
                 <a:spcPct val="90000"/>
               </a:lnSpc>
@@ -14293,9 +14330,10 @@
               <a:buClr>
                 <a:schemeClr val="dk1"/>
               </a:buClr>
-              <a:buSzPts val="6000"/>
-              <a:buFont typeface="Arial"/>
-              <a:buNone/>
+              <a:buSzPct val="25000"/>
+              <a:buFont typeface="Arial"/>
+              <a:buNone/>
+              <a:defRPr/>
             </a:pPr>
             <a:r>
               <a:rPr lang="ko-KR">
@@ -14335,9 +14373,11 @@
       <p:sp>
         <p:nvSpPr>
           <p:cNvPr id="85" name="Google Shape;85;p1"/>
-          <p:cNvSpPr txBox="1"/>
+          <p:cNvSpPr txBox="1">
+            <a:spLocks noGrp="1"/>
+          </p:cNvSpPr>
           <p:nvPr>
-            <p:ph idx="1" type="subTitle"/>
+            <p:ph type="subTitle" idx="1"/>
           </p:nvPr>
         </p:nvSpPr>
         <p:spPr>
@@ -14354,12 +14394,12 @@
           </a:ln>
         </p:spPr>
         <p:txBody>
-          <a:bodyPr anchorCtr="0" anchor="t" bIns="45700" lIns="91425" spcFirstLastPara="1" rIns="91425" wrap="square" tIns="45700">
+          <a:bodyPr wrap="square" lIns="91424" tIns="45700" rIns="91424" bIns="45700" anchor="t" anchorCtr="0">
             <a:normAutofit/>
           </a:bodyPr>
           <a:lstStyle/>
           <a:p>
-            <a:pPr indent="0" lvl="0" marL="0" rtl="0" algn="ctr">
+            <a:pPr marL="0" lvl="0" indent="0" algn="ctr" rtl="0">
               <a:lnSpc>
                 <a:spcPct val="90000"/>
               </a:lnSpc>
@@ -14372,8 +14412,9 @@
               <a:buClr>
                 <a:schemeClr val="dk1"/>
               </a:buClr>
-              <a:buSzPts val="2400"/>
-              <a:buNone/>
+              <a:buSzPct val="25000"/>
+              <a:buNone/>
+              <a:defRPr/>
             </a:pPr>
             <a:r>
               <a:rPr lang="ko-KR">
@@ -14382,9 +14423,18 @@
                 <a:cs typeface="Arial"/>
                 <a:sym typeface="Arial"/>
               </a:rPr>
-              <a:t>25.08.10</a:t>
+              <a:t>25.08.1</a:t>
             </a:r>
-            <a:endParaRPr>
+            <a:r>
+              <a:rPr lang="en-US" altLang="ko-KR">
+                <a:latin typeface="Arial"/>
+                <a:ea typeface="Arial"/>
+                <a:cs typeface="Arial"/>
+                <a:sym typeface="Arial"/>
+              </a:rPr>
+              <a:t>2</a:t>
+            </a:r>
+            <a:endParaRPr lang="en-US" altLang="ko-KR">
               <a:latin typeface="Arial"/>
               <a:ea typeface="Arial"/>
               <a:cs typeface="Arial"/>
@@ -14392,7 +14442,7 @@
             </a:endParaRPr>
           </a:p>
           <a:p>
-            <a:pPr indent="0" lvl="0" marL="0" rtl="0" algn="ctr">
+            <a:pPr marL="0" lvl="0" indent="0" algn="ctr" rtl="0">
               <a:lnSpc>
                 <a:spcPct val="90000"/>
               </a:lnSpc>
@@ -14405,8 +14455,9 @@
               <a:buClr>
                 <a:schemeClr val="dk1"/>
               </a:buClr>
-              <a:buSzPts val="2400"/>
-              <a:buNone/>
+              <a:buSzPct val="25000"/>
+              <a:buNone/>
+              <a:defRPr/>
             </a:pPr>
             <a:r>
               <a:rPr lang="ko-KR">
@@ -14417,7 +14468,7 @@
               </a:rPr>
               <a:t>킬펫</a:t>
             </a:r>
-            <a:endParaRPr>
+            <a:endParaRPr lang="ko-KR">
               <a:latin typeface="Arial"/>
               <a:ea typeface="Arial"/>
               <a:cs typeface="Arial"/>
@@ -14425,7 +14476,7 @@
             </a:endParaRPr>
           </a:p>
           <a:p>
-            <a:pPr indent="0" lvl="0" marL="0" rtl="0" algn="ctr">
+            <a:pPr marL="0" lvl="0" indent="0" algn="ctr" rtl="0">
               <a:lnSpc>
                 <a:spcPct val="90000"/>
               </a:lnSpc>
@@ -14438,12 +14489,10 @@
               <a:buClr>
                 <a:schemeClr val="dk1"/>
               </a:buClr>
-              <a:buSzPts val="2400"/>
-              <a:buNone/>
+              <a:buSzPct val="25000"/>
+              <a:buNone/>
+              <a:defRPr/>
             </a:pPr>
-            <a:r>
-              <a:t/>
-            </a:r>
             <a:endParaRPr>
               <a:latin typeface="Arial"/>
               <a:ea typeface="Arial"/>
@@ -14458,6 +14507,14 @@
   <p:clrMapOvr>
     <a:masterClrMapping/>
   </p:clrMapOvr>
+  <mc:AlternateContent xmlns:mc="http://schemas.openxmlformats.org/markup-compatibility/2006">
+    <mc:Choice xmlns:p14="http://schemas.microsoft.com/office/powerpoint/2010/main" Requires="p14">
+      <p:transition xmlns:mc="http://schemas.openxmlformats.org/markup-compatibility/2006" xmlns:p14="http://schemas.microsoft.com/office/powerpoint/2010/main" mc:Ignorable="p14" p14:dur="500"/>
+    </mc:Choice>
+    <mc:Fallback>
+      <p:transition/>
+    </mc:Fallback>
+  </mc:AlternateContent>
 </p:sld>
 </file>
 
@@ -14800,44 +14857,44 @@
 </file>
 
 <file path=ppt/theme/theme1.xml><?xml version="1.0" encoding="utf-8"?>
-<a:theme xmlns:a="http://schemas.openxmlformats.org/drawingml/2006/main" xmlns:r="http://schemas.openxmlformats.org/officeDocument/2006/relationships">
+<a:theme xmlns:r="http://schemas.openxmlformats.org/officeDocument/2006/relationships" xmlns:c="http://schemas.openxmlformats.org/drawingml/2006/chart" xmlns:dgm="http://schemas.openxmlformats.org/drawingml/2006/diagram" xmlns:dsp="http://schemas.microsoft.com/office/drawing/2008/diagram" xmlns:a="http://schemas.openxmlformats.org/drawingml/2006/main" xmlns:pic="http://schemas.openxmlformats.org/drawingml/2006/picture" xmlns:wp="http://schemas.openxmlformats.org/drawingml/2006/wordprocessingDrawing" xmlns:xdr="http://schemas.openxmlformats.org/drawingml/2006/spreadsheetDrawing" xmlns:lc="http://schemas.openxmlformats.org/drawingml/2006/lockedCanvas" xmlns:p="http://schemas.openxmlformats.org/presentationml/2006/main" name="Office 테마">
   <a:themeElements>
-    <a:clrScheme name="Default">
+    <a:clrScheme name="Office">
       <a:dk1>
         <a:srgbClr val="000000"/>
       </a:dk1>
       <a:lt1>
-        <a:srgbClr val="FFFFFF"/>
+        <a:srgbClr val="ffffff"/>
       </a:lt1>
       <a:dk2>
-        <a:srgbClr val="158158"/>
+        <a:srgbClr val="44546a"/>
       </a:dk2>
       <a:lt2>
-        <a:srgbClr val="F3F3F3"/>
+        <a:srgbClr val="e7e6e6"/>
       </a:lt2>
       <a:accent1>
-        <a:srgbClr val="058DC7"/>
+        <a:srgbClr val="5b9bd5"/>
       </a:accent1>
       <a:accent2>
-        <a:srgbClr val="50B432"/>
+        <a:srgbClr val="ed7d31"/>
       </a:accent2>
       <a:accent3>
-        <a:srgbClr val="ED561B"/>
+        <a:srgbClr val="a5a5a5"/>
       </a:accent3>
       <a:accent4>
-        <a:srgbClr val="EDEF00"/>
+        <a:srgbClr val="ffc000"/>
       </a:accent4>
       <a:accent5>
-        <a:srgbClr val="24CBE5"/>
+        <a:srgbClr val="4472c4"/>
       </a:accent5>
       <a:accent6>
-        <a:srgbClr val="64E572"/>
+        <a:srgbClr val="70ad47"/>
       </a:accent6>
       <a:hlink>
-        <a:srgbClr val="2200CC"/>
+        <a:srgbClr val="0563c1"/>
       </a:hlink>
       <a:folHlink>
-        <a:srgbClr val="551A8B"/>
+        <a:srgbClr val="954f72"/>
       </a:folHlink>
     </a:clrScheme>
     <a:fontScheme name="Office">
@@ -14845,9 +14902,9 @@
         <a:latin typeface="Arial"/>
         <a:ea typeface=""/>
         <a:cs typeface=""/>
-        <a:font script="Jpan" typeface="ＭＳ Ｐゴシック"/>
+        <a:font script="Jpan" typeface="MS PGothic"/>
         <a:font script="Hang" typeface="맑은 고딕"/>
-        <a:font script="Hans" typeface="宋体"/>
+        <a:font script="Hans" typeface="SimSun"/>
         <a:font script="Hant" typeface="新細明體"/>
         <a:font script="Arab" typeface="Times New Roman"/>
         <a:font script="Hebr" typeface="Times New Roman"/>
@@ -14880,9 +14937,9 @@
         <a:latin typeface="Arial"/>
         <a:ea typeface=""/>
         <a:cs typeface=""/>
-        <a:font script="Jpan" typeface="ＭＳ Ｐゴシック"/>
+        <a:font script="Jpan" typeface="MS PGothic"/>
         <a:font script="Hang" typeface="맑은 고딕"/>
-        <a:font script="Hans" typeface="宋体"/>
+        <a:font script="Hans" typeface="SimSun"/>
         <a:font script="Hant" typeface="新細明體"/>
         <a:font script="Arab" typeface="Arial"/>
         <a:font script="Hebr" typeface="Arial"/>
@@ -15079,44 +15136,44 @@
 </file>
 
 <file path=ppt/theme/theme2.xml><?xml version="1.0" encoding="utf-8"?>
-<a:theme xmlns:a="http://schemas.openxmlformats.org/drawingml/2006/main" xmlns:r="http://schemas.openxmlformats.org/officeDocument/2006/relationships" name="Office 테마">
+<a:theme xmlns:r="http://schemas.openxmlformats.org/officeDocument/2006/relationships" xmlns:c="http://schemas.openxmlformats.org/drawingml/2006/chart" xmlns:dgm="http://schemas.openxmlformats.org/drawingml/2006/diagram" xmlns:dsp="http://schemas.microsoft.com/office/drawing/2008/diagram" xmlns:a="http://schemas.openxmlformats.org/drawingml/2006/main" xmlns:pic="http://schemas.openxmlformats.org/drawingml/2006/picture" xmlns:wp="http://schemas.openxmlformats.org/drawingml/2006/wordprocessingDrawing" xmlns:xdr="http://schemas.openxmlformats.org/drawingml/2006/spreadsheetDrawing" xmlns:lc="http://schemas.openxmlformats.org/drawingml/2006/lockedCanvas" xmlns:p="http://schemas.openxmlformats.org/presentationml/2006/main" name="">
   <a:themeElements>
-    <a:clrScheme name="Office">
+    <a:clrScheme name="Default">
       <a:dk1>
         <a:srgbClr val="000000"/>
       </a:dk1>
       <a:lt1>
-        <a:srgbClr val="FFFFFF"/>
+        <a:srgbClr val="ffffff"/>
       </a:lt1>
       <a:dk2>
-        <a:srgbClr val="44546A"/>
+        <a:srgbClr val="158158"/>
       </a:dk2>
       <a:lt2>
-        <a:srgbClr val="E7E6E6"/>
+        <a:srgbClr val="f3f3f3"/>
       </a:lt2>
       <a:accent1>
-        <a:srgbClr val="5B9BD5"/>
+        <a:srgbClr val="058dc7"/>
       </a:accent1>
       <a:accent2>
-        <a:srgbClr val="ED7D31"/>
+        <a:srgbClr val="50b432"/>
       </a:accent2>
       <a:accent3>
-        <a:srgbClr val="A5A5A5"/>
+        <a:srgbClr val="ed561b"/>
       </a:accent3>
       <a:accent4>
-        <a:srgbClr val="FFC000"/>
+        <a:srgbClr val="edef00"/>
       </a:accent4>
       <a:accent5>
-        <a:srgbClr val="4472C4"/>
+        <a:srgbClr val="24cbe5"/>
       </a:accent5>
       <a:accent6>
-        <a:srgbClr val="70AD47"/>
+        <a:srgbClr val="64e572"/>
       </a:accent6>
       <a:hlink>
-        <a:srgbClr val="0563C1"/>
+        <a:srgbClr val="2200cc"/>
       </a:hlink>
       <a:folHlink>
-        <a:srgbClr val="954F72"/>
+        <a:srgbClr val="551a8b"/>
       </a:folHlink>
     </a:clrScheme>
     <a:fontScheme name="Office">
@@ -15124,9 +15181,9 @@
         <a:latin typeface="Arial"/>
         <a:ea typeface=""/>
         <a:cs typeface=""/>
-        <a:font script="Jpan" typeface="ＭＳ Ｐゴシック"/>
+        <a:font script="Jpan" typeface="MS PGothic"/>
         <a:font script="Hang" typeface="맑은 고딕"/>
-        <a:font script="Hans" typeface="宋体"/>
+        <a:font script="Hans" typeface="SimSun"/>
         <a:font script="Hant" typeface="新細明體"/>
         <a:font script="Arab" typeface="Times New Roman"/>
         <a:font script="Hebr" typeface="Times New Roman"/>
@@ -15159,9 +15216,9 @@
         <a:latin typeface="Arial"/>
         <a:ea typeface=""/>
         <a:cs typeface=""/>
-        <a:font script="Jpan" typeface="ＭＳ Ｐゴシック"/>
+        <a:font script="Jpan" typeface="MS PGothic"/>
         <a:font script="Hang" typeface="맑은 고딕"/>
-        <a:font script="Hans" typeface="宋体"/>
+        <a:font script="Hans" typeface="SimSun"/>
         <a:font script="Hant" typeface="新細明體"/>
         <a:font script="Arab" typeface="Arial"/>
         <a:font script="Hebr" typeface="Arial"/>
